--- a/Slide/Boolean_Network_Analyzer_Slides.pptx
+++ b/Slide/Boolean_Network_Analyzer_Slides.pptx
@@ -3713,15 +3713,13 @@
           </a:bodyPr>
           <a:lstStyle/>
           <a:p>
-            <a:pPr algn="ctr"/>
-            <a:r>
-              <a:rPr sz="1100" b="0" i="1">
-                <a:solidFill>
-                  <a:srgbClr val="94A3B8"/>
-                </a:solidFill>
-                <a:latin typeface="Calibri"/>
-              </a:rPr>
-              <a:t>toy_switch.bnet — single fixed point</a:t>
+            <a:r>
+              <a:rPr sz="1200" i="1">
+                <a:solidFill>
+                  <a:srgbClr val="555555"/>
+                </a:solidFill>
+              </a:rPr>
+              <a:t>toy_switch.bnet — single length-4 cyclic attractor</a:t>
             </a:r>
           </a:p>
         </p:txBody>
@@ -4145,7 +4143,7 @@
                     <a:p>
                       <a:pPr algn="l"/>
                       <a:r>
-                        <a:rPr sz="1300" b="1">
+                        <a:rPr sz="1200" b="1">
                           <a:solidFill>
                             <a:srgbClr val="FFFFFF"/>
                           </a:solidFill>
@@ -4168,13 +4166,13 @@
                     <a:p>
                       <a:pPr algn="l"/>
                       <a:r>
-                        <a:rPr sz="1300" b="1">
+                        <a:rPr sz="1200" b="1">
                           <a:solidFill>
                             <a:srgbClr val="FFFFFF"/>
                           </a:solidFill>
                           <a:latin typeface="Calibri"/>
                         </a:rPr>
-                        <a:t>Nodes</a:t>
+                        <a:t>n</a:t>
                       </a:r>
                     </a:p>
                   </a:txBody>
@@ -4191,13 +4189,13 @@
                     <a:p>
                       <a:pPr algn="l"/>
                       <a:r>
-                        <a:rPr sz="1300" b="1">
+                        <a:rPr sz="1200" b="1">
                           <a:solidFill>
                             <a:srgbClr val="FFFFFF"/>
                           </a:solidFill>
                           <a:latin typeface="Calibri"/>
                         </a:rPr>
-                        <a:t>Sync attractors</a:t>
+                        <a:t>Sync attractors (kind / basin %)</a:t>
                       </a:r>
                     </a:p>
                   </a:txBody>
@@ -4214,13 +4212,13 @@
                     <a:p>
                       <a:pPr algn="l"/>
                       <a:r>
-                        <a:rPr sz="1300" b="1">
+                        <a:rPr sz="1200" b="1">
                           <a:solidFill>
                             <a:srgbClr val="FFFFFF"/>
                           </a:solidFill>
                           <a:latin typeface="Calibri"/>
                         </a:rPr>
-                        <a:t>Async attractors</a:t>
+                        <a:t>Async attractors (kind / basin %)</a:t>
                       </a:r>
                     </a:p>
                   </a:txBody>
@@ -4237,13 +4235,13 @@
                     <a:p>
                       <a:pPr algn="l"/>
                       <a:r>
-                        <a:rPr sz="1300" b="1">
+                        <a:rPr sz="1200" b="1">
                           <a:solidFill>
                             <a:srgbClr val="FFFFFF"/>
                           </a:solidFill>
                           <a:latin typeface="Calibri"/>
                         </a:rPr>
-                        <a:t>Reference</a:t>
+                        <a:t>Verdict</a:t>
                       </a:r>
                     </a:p>
                   </a:txBody>
@@ -4262,13 +4260,13 @@
                     <a:p>
                       <a:pPr algn="l"/>
                       <a:r>
-                        <a:rPr sz="1300">
+                        <a:rPr sz="1100" b="0">
                           <a:solidFill>
                             <a:srgbClr val="121B2A"/>
                           </a:solidFill>
                           <a:latin typeface="Calibri"/>
                         </a:rPr>
-                        <a:t>toy_switch</a:t>
+                        <a:t>toy_switch (pedagogical)</a:t>
                       </a:r>
                     </a:p>
                   </a:txBody>
@@ -4285,7 +4283,7 @@
                     <a:p>
                       <a:pPr algn="l"/>
                       <a:r>
-                        <a:rPr sz="1300">
+                        <a:rPr sz="1100" b="0">
                           <a:solidFill>
                             <a:srgbClr val="121B2A"/>
                           </a:solidFill>
@@ -4308,13 +4306,13 @@
                     <a:p>
                       <a:pPr algn="l"/>
                       <a:r>
-                        <a:rPr sz="1300">
+                        <a:rPr sz="1100" b="0">
                           <a:solidFill>
                             <a:srgbClr val="121B2A"/>
                           </a:solidFill>
                           <a:latin typeface="Calibri"/>
                         </a:rPr>
-                        <a:t>1 fixed point</a:t>
+                        <a:t>1 cyclic-4 (100 %)</a:t>
                       </a:r>
                     </a:p>
                   </a:txBody>
@@ -4331,13 +4329,13 @@
                     <a:p>
                       <a:pPr algn="l"/>
                       <a:r>
-                        <a:rPr sz="1300">
+                        <a:rPr sz="1100" b="0">
                           <a:solidFill>
                             <a:srgbClr val="121B2A"/>
                           </a:solidFill>
                           <a:latin typeface="Calibri"/>
                         </a:rPr>
-                        <a:t>1 fixed point</a:t>
+                        <a:t>1 complex-8 (100 %)</a:t>
                       </a:r>
                     </a:p>
                   </a:txBody>
@@ -4354,13 +4352,13 @@
                     <a:p>
                       <a:pPr algn="l"/>
                       <a:r>
-                        <a:rPr sz="1300">
+                        <a:rPr sz="1100" b="0">
                           <a:solidFill>
                             <a:srgbClr val="121B2A"/>
                           </a:solidFill>
                           <a:latin typeface="Calibri"/>
                         </a:rPr>
-                        <a:t>—</a:t>
+                        <a:t>OK</a:t>
                       </a:r>
                     </a:p>
                   </a:txBody>
@@ -4379,13 +4377,14 @@
                     <a:p>
                       <a:pPr algn="l"/>
                       <a:r>
-                        <a:rPr sz="1300">
+                        <a:rPr sz="1100" b="0">
                           <a:solidFill>
                             <a:srgbClr val="121B2A"/>
                           </a:solidFill>
                           <a:latin typeface="Calibri"/>
                         </a:rPr>
-                        <a:t>bistable_toggle</a:t>
+                        <a:t>bistable_toggle
+(Gardner 2000)</a:t>
                       </a:r>
                     </a:p>
                   </a:txBody>
@@ -4402,7 +4401,7 @@
                     <a:p>
                       <a:pPr algn="l"/>
                       <a:r>
-                        <a:rPr sz="1300">
+                        <a:rPr sz="1100" b="0">
                           <a:solidFill>
                             <a:srgbClr val="121B2A"/>
                           </a:solidFill>
@@ -4425,13 +4424,13 @@
                     <a:p>
                       <a:pPr algn="l"/>
                       <a:r>
-                        <a:rPr sz="1300">
+                        <a:rPr sz="1100" b="0">
                           <a:solidFill>
                             <a:srgbClr val="121B2A"/>
                           </a:solidFill>
                           <a:latin typeface="Calibri"/>
                         </a:rPr>
-                        <a:t>2 FP + 1 cyclic</a:t>
+                        <a:t>2 fixed pts (25 % each) + 1 cyclic-2 (50 %, sync artefact)</a:t>
                       </a:r>
                     </a:p>
                   </a:txBody>
@@ -4448,13 +4447,13 @@
                     <a:p>
                       <a:pPr algn="l"/>
                       <a:r>
-                        <a:rPr sz="1300">
+                        <a:rPr sz="1100" b="0">
                           <a:solidFill>
                             <a:srgbClr val="121B2A"/>
                           </a:solidFill>
                           <a:latin typeface="Calibri"/>
                         </a:rPr>
-                        <a:t>2 fixed points</a:t>
+                        <a:t>2 fixed pts (75 % each)</a:t>
                       </a:r>
                     </a:p>
                   </a:txBody>
@@ -4471,13 +4470,14 @@
                     <a:p>
                       <a:pPr algn="l"/>
                       <a:r>
-                        <a:rPr sz="1300">
+                        <a:rPr sz="1100" b="0">
                           <a:solidFill>
                             <a:srgbClr val="121B2A"/>
                           </a:solidFill>
                           <a:latin typeface="Calibri"/>
                         </a:rPr>
-                        <a:t>Gardner 2000</a:t>
+                        <a:t>MATCH
+bistability</a:t>
                       </a:r>
                     </a:p>
                   </a:txBody>
@@ -4496,13 +4496,14 @@
                     <a:p>
                       <a:pPr algn="l"/>
                       <a:r>
-                        <a:rPr sz="1300">
+                        <a:rPr sz="1100" b="0">
                           <a:solidFill>
                             <a:srgbClr val="121B2A"/>
                           </a:solidFill>
                           <a:latin typeface="Calibri"/>
                         </a:rPr>
-                        <a:t>repressilator</a:t>
+                        <a:t>repressilator
+(Elowitz 2000)</a:t>
                       </a:r>
                     </a:p>
                   </a:txBody>
@@ -4519,7 +4520,7 @@
                     <a:p>
                       <a:pPr algn="l"/>
                       <a:r>
-                        <a:rPr sz="1300">
+                        <a:rPr sz="1100" b="0">
                           <a:solidFill>
                             <a:srgbClr val="121B2A"/>
                           </a:solidFill>
@@ -4542,13 +4543,13 @@
                     <a:p>
                       <a:pPr algn="l"/>
                       <a:r>
-                        <a:rPr sz="1300">
+                        <a:rPr sz="1100" b="0">
                           <a:solidFill>
                             <a:srgbClr val="121B2A"/>
                           </a:solidFill>
                           <a:latin typeface="Calibri"/>
                         </a:rPr>
-                        <a:t>length-6 cycle + length-2 cycle</a:t>
+                        <a:t>1 cyclic-6 (75 %) + 1 cyclic-2 (25 %, artefact)</a:t>
                       </a:r>
                     </a:p>
                   </a:txBody>
@@ -4565,13 +4566,13 @@
                     <a:p>
                       <a:pPr algn="l"/>
                       <a:r>
-                        <a:rPr sz="1300">
+                        <a:rPr sz="1100" b="0">
                           <a:solidFill>
                             <a:srgbClr val="121B2A"/>
                           </a:solidFill>
                           <a:latin typeface="Calibri"/>
                         </a:rPr>
-                        <a:t>1 complex</a:t>
+                        <a:t>1 cyclic-6 (100 %)</a:t>
                       </a:r>
                     </a:p>
                   </a:txBody>
@@ -4588,13 +4589,14 @@
                     <a:p>
                       <a:pPr algn="l"/>
                       <a:r>
-                        <a:rPr sz="1300">
+                        <a:rPr sz="1100" b="0">
                           <a:solidFill>
                             <a:srgbClr val="121B2A"/>
                           </a:solidFill>
                           <a:latin typeface="Calibri"/>
                         </a:rPr>
-                        <a:t>Elowitz 2000</a:t>
+                        <a:t>MATCH
+oscillation</a:t>
                       </a:r>
                     </a:p>
                   </a:txBody>
@@ -4613,13 +4615,14 @@
                     <a:p>
                       <a:pPr algn="l"/>
                       <a:r>
-                        <a:rPr sz="1300">
+                        <a:rPr sz="1100" b="0">
                           <a:solidFill>
                             <a:srgbClr val="121B2A"/>
                           </a:solidFill>
                           <a:latin typeface="Calibri"/>
                         </a:rPr>
-                        <a:t>fission_yeast</a:t>
+                        <a:t>fission_yeast
+(Davidich 2008)</a:t>
                       </a:r>
                     </a:p>
                   </a:txBody>
@@ -4636,7 +4639,7 @@
                     <a:p>
                       <a:pPr algn="l"/>
                       <a:r>
-                        <a:rPr sz="1300">
+                        <a:rPr sz="1100" b="0">
                           <a:solidFill>
                             <a:srgbClr val="121B2A"/>
                           </a:solidFill>
@@ -4659,13 +4662,13 @@
                     <a:p>
                       <a:pPr algn="l"/>
                       <a:r>
-                        <a:rPr sz="1300">
+                        <a:rPr sz="1100" b="0">
                           <a:solidFill>
                             <a:srgbClr val="121B2A"/>
                           </a:solidFill>
                           <a:latin typeface="Calibri"/>
                         </a:rPr>
-                        <a:t>1 dominant FP (G1)</a:t>
+                        <a:t>3 cyclic-2: basins 456 / 50 / 6 (89.1 / 9.8 / 1.2 %)</a:t>
                       </a:r>
                     </a:p>
                   </a:txBody>
@@ -4682,13 +4685,13 @@
                     <a:p>
                       <a:pPr algn="l"/>
                       <a:r>
-                        <a:rPr sz="1300">
+                        <a:rPr sz="1100" b="0">
                           <a:solidFill>
                             <a:srgbClr val="121B2A"/>
                           </a:solidFill>
                           <a:latin typeface="Calibri"/>
                         </a:rPr>
-                        <a:t>1 dominant FP</a:t>
+                        <a:t>1 complex-8 (100 %)</a:t>
                       </a:r>
                     </a:p>
                   </a:txBody>
@@ -4705,13 +4708,14 @@
                     <a:p>
                       <a:pPr algn="l"/>
                       <a:r>
-                        <a:rPr sz="1300">
+                        <a:rPr sz="1100" b="0">
                           <a:solidFill>
                             <a:srgbClr val="121B2A"/>
                           </a:solidFill>
                           <a:latin typeface="Calibri"/>
                         </a:rPr>
-                        <a:t>Davidich 2008</a:t>
+                        <a:t>MATCH
+G1 dominance</a:t>
                       </a:r>
                     </a:p>
                   </a:txBody>
@@ -4730,13 +4734,14 @@
                     <a:p>
                       <a:pPr algn="l"/>
                       <a:r>
-                        <a:rPr sz="1300">
+                        <a:rPr sz="1100" b="0">
                           <a:solidFill>
                             <a:srgbClr val="121B2A"/>
                           </a:solidFill>
                           <a:latin typeface="Calibri"/>
                         </a:rPr>
-                        <a:t>mammalian_cycle</a:t>
+                        <a:t>mammalian_cycle
+(Faure 2006)</a:t>
                       </a:r>
                     </a:p>
                   </a:txBody>
@@ -4753,7 +4758,7 @@
                     <a:p>
                       <a:pPr algn="l"/>
                       <a:r>
-                        <a:rPr sz="1300">
+                        <a:rPr sz="1100" b="0">
                           <a:solidFill>
                             <a:srgbClr val="121B2A"/>
                           </a:solidFill>
@@ -4776,13 +4781,13 @@
                     <a:p>
                       <a:pPr algn="l"/>
                       <a:r>
-                        <a:rPr sz="1300">
+                        <a:rPr sz="1100" b="0">
                           <a:solidFill>
                             <a:srgbClr val="121B2A"/>
                           </a:solidFill>
                           <a:latin typeface="Calibri"/>
                         </a:rPr>
-                        <a:t>FP + cycle</a:t>
+                        <a:t>1 FP (G0, 50 %) + 1 cyclic-7 (50 %)</a:t>
                       </a:r>
                     </a:p>
                   </a:txBody>
@@ -4799,13 +4804,13 @@
                     <a:p>
                       <a:pPr algn="l"/>
                       <a:r>
-                        <a:rPr sz="1300">
+                        <a:rPr sz="1100" b="0">
                           <a:solidFill>
                             <a:srgbClr val="121B2A"/>
                           </a:solidFill>
                           <a:latin typeface="Calibri"/>
                         </a:rPr>
-                        <a:t>1 complex (cycling)</a:t>
+                        <a:t>1 FP (50 %) + 1 complex-112 (50 %)</a:t>
                       </a:r>
                     </a:p>
                   </a:txBody>
@@ -4822,13 +4827,14 @@
                     <a:p>
                       <a:pPr algn="l"/>
                       <a:r>
-                        <a:rPr sz="1300">
+                        <a:rPr sz="1100" b="0">
                           <a:solidFill>
                             <a:srgbClr val="121B2A"/>
                           </a:solidFill>
                           <a:latin typeface="Calibri"/>
                         </a:rPr>
-                        <a:t>Faure 2006</a:t>
+                        <a:t>MATCH
+cycling region</a:t>
                       </a:r>
                     </a:p>
                   </a:txBody>
@@ -4909,6 +4915,39 @@
                 <a:latin typeface="Calibri"/>
               </a:rPr>
               <a:t>11 / 14</a:t>
+            </a:r>
+          </a:p>
+        </p:txBody>
+      </p:sp>
+      <p:sp>
+        <p:nvSpPr>
+          <p:cNvPr id="8" name="TextBox 7"/>
+          <p:cNvSpPr txBox="1"/>
+          <p:nvPr/>
+        </p:nvSpPr>
+        <p:spPr>
+          <a:xfrm>
+            <a:off x="640080" y="5806440"/>
+            <a:ext cx="10881360" cy="502920"/>
+          </a:xfrm>
+          <a:prstGeom prst="rect">
+            <a:avLst/>
+          </a:prstGeom>
+          <a:noFill/>
+        </p:spPr>
+        <p:txBody>
+          <a:bodyPr wrap="square">
+            <a:spAutoFit/>
+          </a:bodyPr>
+          <a:lstStyle/>
+          <a:p>
+            <a:r>
+              <a:rPr sz="1100" i="1">
+                <a:solidFill>
+                  <a:srgbClr val="555555"/>
+                </a:solidFill>
+              </a:rPr>
+              <a:t>Independently re-verified: on every (network × scheme) pair the Python reference engine and the in-browser JavaScript engine return attractors with identical kind, size, and member states.</a:t>
             </a:r>
           </a:p>
         </p:txBody>
@@ -6333,15 +6372,13 @@
           </a:bodyPr>
           <a:lstStyle/>
           <a:p>
-            <a:pPr algn="ctr"/>
-            <a:r>
-              <a:rPr sz="1400" b="0" i="1">
-                <a:solidFill>
-                  <a:srgbClr val="94A3B8"/>
-                </a:solidFill>
-                <a:latin typeface="Calibri"/>
-              </a:rPr>
-              <a:t>github.com/&lt;your-username&gt;/boolean-network-analyzer</a:t>
+            <a:r>
+              <a:rPr sz="1600">
+                <a:solidFill>
+                  <a:srgbClr val="CADCFC"/>
+                </a:solidFill>
+              </a:rPr>
+              <a:t>GitHub repository — see README.md for the live link</a:t>
             </a:r>
           </a:p>
         </p:txBody>
@@ -11658,7 +11695,7 @@
         <p:spPr>
           <a:xfrm>
             <a:off x="457200" y="868680"/>
-            <a:ext cx="11430000" cy="365760"/>
+            <a:ext cx="11430000" cy="640080"/>
           </a:xfrm>
           <a:prstGeom prst="rect">
             <a:avLst/>
@@ -11680,6 +11717,16 @@
                 <a:latin typeface="Calibri"/>
               </a:rPr>
               <a:t>Five tabs over a shared sidebar</a:t>
+            </a:r>
+          </a:p>
+          <a:p>
+            <a:r>
+              <a:rPr sz="1100" i="1">
+                <a:solidFill>
+                  <a:srgbClr val="555555"/>
+                </a:solidFill>
+              </a:rPr>
+              <a:t>+ available as a no-install in-browser JavaScript port (docs/app.html) — same panels, validated to match the Python engine on every sample</a:t>
             </a:r>
           </a:p>
         </p:txBody>
